--- a/docs/investor_update_2026-09-19.pptx
+++ b/docs/investor_update_2026-09-19.pptx
@@ -4,17 +4,19 @@
   <p:sldMasterIdLst>
     <p:sldMasterId id="2147483648" r:id="rId1"/>
   </p:sldMasterIdLst>
+  <p:notesMasterIdLst>
+    <p:notesMasterId r:id="rId9"/>
+  </p:notesMasterIdLst>
   <p:sldIdLst>
-    <p:sldId id="256" r:id="rId7"/>
-    <p:sldId id="257" r:id="rId9"/>
-    <p:sldId id="258" r:id="rId10"/>
-    <p:sldId id="259" r:id="rId11"/>
-    <p:sldId id="260" r:id="rId12"/>
-    <p:sldId id="261" r:id="rId13"/>
-    <p:sldId id="262" r:id="rId14"/>
-    <p:sldId id="263" r:id="rId15"/>
+    <p:sldId id="256" r:id="rId2"/>
+    <p:sldId id="257" r:id="rId3"/>
+    <p:sldId id="258" r:id="rId4"/>
+    <p:sldId id="259" r:id="rId5"/>
+    <p:sldId id="260" r:id="rId6"/>
+    <p:sldId id="262" r:id="rId7"/>
+    <p:sldId id="263" r:id="rId8"/>
   </p:sldIdLst>
-  <p:sldSz cx="12191695" cy="6858000" type="screen4x3"/>
+  <p:sldSz cx="12192000" cy="6858000"/>
   <p:notesSz cx="6858000" cy="9144000"/>
   <p:defaultTextStyle>
     <a:defPPr>
@@ -111,11 +113,27 @@
       </a:defRPr>
     </a:lvl9pPr>
   </p:defaultTextStyle>
+  <p:extLst>
+    <p:ext uri="{EFAFB233-063F-42B5-8137-9DF3F51BA10A}">
+      <p15:sldGuideLst xmlns:p15="http://schemas.microsoft.com/office/powerpoint/2012/main">
+        <p15:guide id="1" orient="horz" pos="2160">
+          <p15:clr>
+            <a:srgbClr val="A4A3A4"/>
+          </p15:clr>
+        </p15:guide>
+        <p15:guide id="2" pos="2880">
+          <p15:clr>
+            <a:srgbClr val="A4A3A4"/>
+          </p15:clr>
+        </p15:guide>
+      </p15:sldGuideLst>
+    </p:ext>
+  </p:extLst>
 </p:presentation>
 </file>
 
 <file path=ppt/notesMasters/notesMaster1.xml><?xml version="1.0" encoding="utf-8"?>
-<p:notesMaster xmlns:a="http://schemas.openxmlformats.org/drawingml/2006/main" xmlns:p="http://schemas.openxmlformats.org/presentationml/2006/main" xmlns:r="http://schemas.openxmlformats.org/officeDocument/2006/relationships">
+<p:notesMaster xmlns:a="http://schemas.openxmlformats.org/drawingml/2006/main" xmlns:r="http://schemas.openxmlformats.org/officeDocument/2006/relationships" xmlns:p="http://schemas.openxmlformats.org/presentationml/2006/main">
   <p:cSld>
     <p:bg>
       <p:bgRef idx="1001">
@@ -136,241 +154,16 @@
           <a:chExt cx="0" cy="0"/>
         </a:xfrm>
       </p:grpSpPr>
-      <p:sp>
-        <p:nvSpPr>
-          <p:cNvPr id="2" name="Header Placeholder 1"/>
-          <p:cNvSpPr>
-            <a:spLocks noGrp="1"/>
-          </p:cNvSpPr>
-          <p:nvPr>
-            <p:ph type="hdr" sz="quarter"/>
-          </p:nvPr>
-        </p:nvSpPr>
-        <p:spPr>
-          <a:xfrm>
-            <a:off x="0" y="0"/>
-            <a:ext cx="2971800" cy="457200"/>
-          </a:xfrm>
-          <a:prstGeom prst="rect">
-            <a:avLst/>
-          </a:prstGeom>
-        </p:spPr>
-        <p:txBody>
-          <a:bodyPr vert="horz" lIns="91440" tIns="45720" rIns="91440" bIns="45720" rtlCol="0"/>
-          <a:lstStyle>
-            <a:lvl1pPr algn="l">
-              <a:defRPr sz="1200"/>
-            </a:lvl1pPr>
-          </a:lstStyle>
-          <a:p>
-            <a:endParaRPr lang="en-US"/>
-          </a:p>
-        </p:txBody>
-      </p:sp>
-      <p:sp>
-        <p:nvSpPr>
-          <p:cNvPr id="3" name="Date Placeholder 2"/>
-          <p:cNvSpPr>
-            <a:spLocks noGrp="1"/>
-          </p:cNvSpPr>
-          <p:nvPr>
-            <p:ph type="dt" idx="1"/>
-          </p:nvPr>
-        </p:nvSpPr>
-        <p:spPr>
-          <a:xfrm>
-            <a:off x="3884613" y="0"/>
-            <a:ext cx="2971800" cy="457200"/>
-          </a:xfrm>
-          <a:prstGeom prst="rect">
-            <a:avLst/>
-          </a:prstGeom>
-        </p:spPr>
-        <p:txBody>
-          <a:bodyPr vert="horz" lIns="91440" tIns="45720" rIns="91440" bIns="45720" rtlCol="0"/>
-          <a:lstStyle>
-            <a:lvl1pPr algn="r">
-              <a:defRPr sz="1200"/>
-            </a:lvl1pPr>
-          </a:lstStyle>
-          <a:p>
-            <a:fld id="{0F89C1C7-3DCD-1040-A9CF-14679D8B5DDD}" type="datetimeFigureOut">
-              <a:rPr lang="en-US" smtClean="0"/>
-              <a:t>10/17/16</a:t>
-            </a:fld>
-            <a:endParaRPr lang="en-US"/>
-          </a:p>
-        </p:txBody>
-      </p:sp>
-      <p:sp>
-        <p:nvSpPr>
-          <p:cNvPr id="4" name="Slide Image Placeholder 3"/>
-          <p:cNvSpPr>
-            <a:spLocks noGrp="1" noRot="1" noChangeAspect="1"/>
-          </p:cNvSpPr>
-          <p:nvPr>
-            <p:ph type="sldImg" idx="2"/>
-          </p:nvPr>
-        </p:nvSpPr>
-        <p:spPr>
-          <a:xfrm>
-            <a:off x="1143000" y="685800"/>
-            <a:ext cx="4572000" cy="3429000"/>
-          </a:xfrm>
-          <a:prstGeom prst="rect">
-            <a:avLst/>
-          </a:prstGeom>
-          <a:noFill/>
-          <a:ln w="12700">
-            <a:solidFill>
-              <a:prstClr val="black"/>
-            </a:solidFill>
-          </a:ln>
-        </p:spPr>
-        <p:txBody>
-          <a:bodyPr vert="horz" lIns="91440" tIns="45720" rIns="91440" bIns="45720" rtlCol="0" anchor="ctr"/>
-          <a:lstStyle/>
-          <a:p>
-            <a:endParaRPr lang="en-US"/>
-          </a:p>
-        </p:txBody>
-      </p:sp>
-      <p:sp>
-        <p:nvSpPr>
-          <p:cNvPr id="5" name="Notes Placeholder 4"/>
-          <p:cNvSpPr>
-            <a:spLocks noGrp="1"/>
-          </p:cNvSpPr>
-          <p:nvPr>
-            <p:ph type="body" sz="quarter" idx="3"/>
-          </p:nvPr>
-        </p:nvSpPr>
-        <p:spPr>
-          <a:xfrm>
-            <a:off x="685800" y="4343400"/>
-            <a:ext cx="5486400" cy="4114800"/>
-          </a:xfrm>
-          <a:prstGeom prst="rect">
-            <a:avLst/>
-          </a:prstGeom>
-        </p:spPr>
-        <p:txBody>
-          <a:bodyPr vert="horz" lIns="91440" tIns="45720" rIns="91440" bIns="45720" rtlCol="0"/>
-          <a:lstStyle/>
-          <a:p>
-            <a:pPr lvl="0"/>
-            <a:r>
-              <a:rPr lang="en-US" smtClean="0"/>
-              <a:t>Click to edit Master text styles</a:t>
-            </a:r>
-          </a:p>
-          <a:p>
-            <a:pPr lvl="1"/>
-            <a:r>
-              <a:rPr lang="en-US" smtClean="0"/>
-              <a:t>Second level</a:t>
-            </a:r>
-          </a:p>
-          <a:p>
-            <a:pPr lvl="2"/>
-            <a:r>
-              <a:rPr lang="en-US" smtClean="0"/>
-              <a:t>Third level</a:t>
-            </a:r>
-          </a:p>
-          <a:p>
-            <a:pPr lvl="3"/>
-            <a:r>
-              <a:rPr lang="en-US" smtClean="0"/>
-              <a:t>Fourth level</a:t>
-            </a:r>
-          </a:p>
-          <a:p>
-            <a:pPr lvl="4"/>
-            <a:r>
-              <a:rPr lang="en-US" smtClean="0"/>
-              <a:t>Fifth level</a:t>
-            </a:r>
-            <a:endParaRPr lang="en-US"/>
-          </a:p>
-        </p:txBody>
-      </p:sp>
-      <p:sp>
-        <p:nvSpPr>
-          <p:cNvPr id="6" name="Footer Placeholder 5"/>
-          <p:cNvSpPr>
-            <a:spLocks noGrp="1"/>
-          </p:cNvSpPr>
-          <p:nvPr>
-            <p:ph type="ftr" sz="quarter" idx="4"/>
-          </p:nvPr>
-        </p:nvSpPr>
-        <p:spPr>
-          <a:xfrm>
-            <a:off x="0" y="8685213"/>
-            <a:ext cx="2971800" cy="457200"/>
-          </a:xfrm>
-          <a:prstGeom prst="rect">
-            <a:avLst/>
-          </a:prstGeom>
-        </p:spPr>
-        <p:txBody>
-          <a:bodyPr vert="horz" lIns="91440" tIns="45720" rIns="91440" bIns="45720" rtlCol="0" anchor="b"/>
-          <a:lstStyle>
-            <a:lvl1pPr algn="l">
-              <a:defRPr sz="1200"/>
-            </a:lvl1pPr>
-          </a:lstStyle>
-          <a:p>
-            <a:endParaRPr lang="en-US"/>
-          </a:p>
-        </p:txBody>
-      </p:sp>
-      <p:sp>
-        <p:nvSpPr>
-          <p:cNvPr id="7" name="Slide Number Placeholder 6"/>
-          <p:cNvSpPr>
-            <a:spLocks noGrp="1"/>
-          </p:cNvSpPr>
-          <p:nvPr>
-            <p:ph type="sldNum" sz="quarter" idx="5"/>
-          </p:nvPr>
-        </p:nvSpPr>
-        <p:spPr>
-          <a:xfrm>
-            <a:off x="3884613" y="8685213"/>
-            <a:ext cx="2971800" cy="457200"/>
-          </a:xfrm>
-          <a:prstGeom prst="rect">
-            <a:avLst/>
-          </a:prstGeom>
-        </p:spPr>
-        <p:txBody>
-          <a:bodyPr vert="horz" lIns="91440" tIns="45720" rIns="91440" bIns="45720" rtlCol="0" anchor="b"/>
-          <a:lstStyle>
-            <a:lvl1pPr algn="r">
-              <a:defRPr sz="1200"/>
-            </a:lvl1pPr>
-          </a:lstStyle>
-          <a:p>
-            <a:fld id="{BB5E49A5-4136-284D-997B-48E1D791AD67}" type="slidenum">
-              <a:rPr lang="en-US" smtClean="0"/>
-              <a:t>‹#›</a:t>
-            </a:fld>
-            <a:endParaRPr lang="en-US"/>
-          </a:p>
-        </p:txBody>
-      </p:sp>
     </p:spTree>
     <p:extLst>
       <p:ext uri="{BB962C8B-B14F-4D97-AF65-F5344CB8AC3E}">
-        <p14:creationId xmlns:p14="http://schemas.microsoft.com/office/powerpoint/2010/main" val="2623252185"/>
+        <p14:creationId xmlns:p14="http://schemas.microsoft.com/office/powerpoint/2010/main" val="4264264999"/>
       </p:ext>
     </p:extLst>
   </p:cSld>
   <p:clrMap bg1="lt1" tx1="dk1" bg2="lt2" tx2="dk2" accent1="accent1" accent2="accent2" accent3="accent3" accent4="accent4" accent5="accent5" accent6="accent6" hlink="hlink" folHlink="folHlink"/>
   <p:notesStyle>
-    <a:lvl1pPr marL="0" algn="l" defTabSz="457200" rtl="0" eaLnBrk="1" latinLnBrk="0" hangingPunct="1">
+    <a:lvl1pPr marL="0" algn="l" defTabSz="914400" rtl="0" eaLnBrk="1" latinLnBrk="0" hangingPunct="1">
       <a:defRPr sz="1200" kern="1200">
         <a:solidFill>
           <a:schemeClr val="tx1"/>
@@ -380,7 +173,7 @@
         <a:cs typeface="+mn-cs"/>
       </a:defRPr>
     </a:lvl1pPr>
-    <a:lvl2pPr marL="457200" algn="l" defTabSz="457200" rtl="0" eaLnBrk="1" latinLnBrk="0" hangingPunct="1">
+    <a:lvl2pPr marL="457200" algn="l" defTabSz="914400" rtl="0" eaLnBrk="1" latinLnBrk="0" hangingPunct="1">
       <a:defRPr sz="1200" kern="1200">
         <a:solidFill>
           <a:schemeClr val="tx1"/>
@@ -390,7 +183,7 @@
         <a:cs typeface="+mn-cs"/>
       </a:defRPr>
     </a:lvl2pPr>
-    <a:lvl3pPr marL="914400" algn="l" defTabSz="457200" rtl="0" eaLnBrk="1" latinLnBrk="0" hangingPunct="1">
+    <a:lvl3pPr marL="914400" algn="l" defTabSz="914400" rtl="0" eaLnBrk="1" latinLnBrk="0" hangingPunct="1">
       <a:defRPr sz="1200" kern="1200">
         <a:solidFill>
           <a:schemeClr val="tx1"/>
@@ -400,7 +193,7 @@
         <a:cs typeface="+mn-cs"/>
       </a:defRPr>
     </a:lvl3pPr>
-    <a:lvl4pPr marL="1371600" algn="l" defTabSz="457200" rtl="0" eaLnBrk="1" latinLnBrk="0" hangingPunct="1">
+    <a:lvl4pPr marL="1371600" algn="l" defTabSz="914400" rtl="0" eaLnBrk="1" latinLnBrk="0" hangingPunct="1">
       <a:defRPr sz="1200" kern="1200">
         <a:solidFill>
           <a:schemeClr val="tx1"/>
@@ -410,7 +203,7 @@
         <a:cs typeface="+mn-cs"/>
       </a:defRPr>
     </a:lvl4pPr>
-    <a:lvl5pPr marL="1828800" algn="l" defTabSz="457200" rtl="0" eaLnBrk="1" latinLnBrk="0" hangingPunct="1">
+    <a:lvl5pPr marL="1828800" algn="l" defTabSz="914400" rtl="0" eaLnBrk="1" latinLnBrk="0" hangingPunct="1">
       <a:defRPr sz="1200" kern="1200">
         <a:solidFill>
           <a:schemeClr val="tx1"/>
@@ -420,7 +213,7 @@
         <a:cs typeface="+mn-cs"/>
       </a:defRPr>
     </a:lvl5pPr>
-    <a:lvl6pPr marL="2286000" algn="l" defTabSz="457200" rtl="0" eaLnBrk="1" latinLnBrk="0" hangingPunct="1">
+    <a:lvl6pPr marL="2286000" algn="l" defTabSz="914400" rtl="0" eaLnBrk="1" latinLnBrk="0" hangingPunct="1">
       <a:defRPr sz="1200" kern="1200">
         <a:solidFill>
           <a:schemeClr val="tx1"/>
@@ -430,7 +223,7 @@
         <a:cs typeface="+mn-cs"/>
       </a:defRPr>
     </a:lvl6pPr>
-    <a:lvl7pPr marL="2743200" algn="l" defTabSz="457200" rtl="0" eaLnBrk="1" latinLnBrk="0" hangingPunct="1">
+    <a:lvl7pPr marL="2743200" algn="l" defTabSz="914400" rtl="0" eaLnBrk="1" latinLnBrk="0" hangingPunct="1">
       <a:defRPr sz="1200" kern="1200">
         <a:solidFill>
           <a:schemeClr val="tx1"/>
@@ -440,7 +233,7 @@
         <a:cs typeface="+mn-cs"/>
       </a:defRPr>
     </a:lvl7pPr>
-    <a:lvl8pPr marL="3200400" algn="l" defTabSz="457200" rtl="0" eaLnBrk="1" latinLnBrk="0" hangingPunct="1">
+    <a:lvl8pPr marL="3200400" algn="l" defTabSz="914400" rtl="0" eaLnBrk="1" latinLnBrk="0" hangingPunct="1">
       <a:defRPr sz="1200" kern="1200">
         <a:solidFill>
           <a:schemeClr val="tx1"/>
@@ -450,7 +243,7 @@
         <a:cs typeface="+mn-cs"/>
       </a:defRPr>
     </a:lvl8pPr>
-    <a:lvl9pPr marL="3657600" algn="l" defTabSz="457200" rtl="0" eaLnBrk="1" latinLnBrk="0" hangingPunct="1">
+    <a:lvl9pPr marL="3657600" algn="l" defTabSz="914400" rtl="0" eaLnBrk="1" latinLnBrk="0" hangingPunct="1">
       <a:defRPr sz="1200" kern="1200">
         <a:solidFill>
           <a:schemeClr val="tx1"/>
@@ -465,7 +258,7 @@
 </file>
 
 <file path=ppt/notesSlides/notesSlide1.xml><?xml version="1.0" encoding="utf-8"?>
-<p:notes xmlns:a="http://schemas.openxmlformats.org/drawingml/2006/main" xmlns:p="http://schemas.openxmlformats.org/presentationml/2006/main" xmlns:r="http://schemas.openxmlformats.org/officeDocument/2006/relationships">
+<p:notes xmlns:a="http://schemas.openxmlformats.org/drawingml/2006/main" xmlns:r="http://schemas.openxmlformats.org/officeDocument/2006/relationships" xmlns:p="http://schemas.openxmlformats.org/presentationml/2006/main">
   <p:cSld>
     <p:spTree>
       <p:nvGrpSpPr>
@@ -485,7 +278,7 @@
         <p:nvSpPr>
           <p:cNvPr id="2" name="Slide Image Placeholder 1"/>
           <p:cNvSpPr>
-            <a:spLocks noGrp="1"/>
+            <a:spLocks noGrp="1" noRot="1" noChangeAspect="1"/>
           </p:cNvSpPr>
           <p:nvPr>
             <p:ph type="sldImg" idx="2"/>
@@ -500,7 +293,7 @@
             <a:spLocks noGrp="1"/>
           </p:cNvSpPr>
           <p:nvPr>
-            <p:ph type="body" idx="3" sz="quarter"/>
+            <p:ph type="body" sz="quarter" idx="3"/>
           </p:nvPr>
         </p:nvSpPr>
         <p:spPr/>
@@ -521,7 +314,7 @@
             <a:spLocks noGrp="1"/>
           </p:cNvSpPr>
           <p:nvPr>
-            <p:ph type="sldNum" idx="5" sz="quarter"/>
+            <p:ph type="sldNum" sz="quarter" idx="5"/>
           </p:nvPr>
         </p:nvSpPr>
         <p:spPr/>
@@ -535,7 +328,7 @@
 </file>
 
 <file path=ppt/notesSlides/notesSlide2.xml><?xml version="1.0" encoding="utf-8"?>
-<p:notes xmlns:a="http://schemas.openxmlformats.org/drawingml/2006/main" xmlns:p="http://schemas.openxmlformats.org/presentationml/2006/main" xmlns:r="http://schemas.openxmlformats.org/officeDocument/2006/relationships">
+<p:notes xmlns:a="http://schemas.openxmlformats.org/drawingml/2006/main" xmlns:r="http://schemas.openxmlformats.org/officeDocument/2006/relationships" xmlns:p="http://schemas.openxmlformats.org/presentationml/2006/main">
   <p:cSld>
     <p:spTree>
       <p:nvGrpSpPr>
@@ -555,7 +348,7 @@
         <p:nvSpPr>
           <p:cNvPr id="2" name="Slide Image Placeholder 1"/>
           <p:cNvSpPr>
-            <a:spLocks noGrp="1"/>
+            <a:spLocks noGrp="1" noRot="1" noChangeAspect="1"/>
           </p:cNvSpPr>
           <p:nvPr>
             <p:ph type="sldImg" idx="2"/>
@@ -570,7 +363,7 @@
             <a:spLocks noGrp="1"/>
           </p:cNvSpPr>
           <p:nvPr>
-            <p:ph type="body" idx="3" sz="quarter"/>
+            <p:ph type="body" sz="quarter" idx="3"/>
           </p:nvPr>
         </p:nvSpPr>
         <p:spPr/>
@@ -591,7 +384,7 @@
             <a:spLocks noGrp="1"/>
           </p:cNvSpPr>
           <p:nvPr>
-            <p:ph type="sldNum" idx="5" sz="quarter"/>
+            <p:ph type="sldNum" sz="quarter" idx="5"/>
           </p:nvPr>
         </p:nvSpPr>
         <p:spPr/>
@@ -605,7 +398,7 @@
 </file>
 
 <file path=ppt/notesSlides/notesSlide3.xml><?xml version="1.0" encoding="utf-8"?>
-<p:notes xmlns:a="http://schemas.openxmlformats.org/drawingml/2006/main" xmlns:p="http://schemas.openxmlformats.org/presentationml/2006/main" xmlns:r="http://schemas.openxmlformats.org/officeDocument/2006/relationships">
+<p:notes xmlns:a="http://schemas.openxmlformats.org/drawingml/2006/main" xmlns:r="http://schemas.openxmlformats.org/officeDocument/2006/relationships" xmlns:p="http://schemas.openxmlformats.org/presentationml/2006/main">
   <p:cSld>
     <p:spTree>
       <p:nvGrpSpPr>
@@ -625,7 +418,7 @@
         <p:nvSpPr>
           <p:cNvPr id="2" name="Slide Image Placeholder 1"/>
           <p:cNvSpPr>
-            <a:spLocks noGrp="1"/>
+            <a:spLocks noGrp="1" noRot="1" noChangeAspect="1"/>
           </p:cNvSpPr>
           <p:nvPr>
             <p:ph type="sldImg" idx="2"/>
@@ -640,7 +433,7 @@
             <a:spLocks noGrp="1"/>
           </p:cNvSpPr>
           <p:nvPr>
-            <p:ph type="body" idx="3" sz="quarter"/>
+            <p:ph type="body" sz="quarter" idx="3"/>
           </p:nvPr>
         </p:nvSpPr>
         <p:spPr/>
@@ -661,7 +454,7 @@
             <a:spLocks noGrp="1"/>
           </p:cNvSpPr>
           <p:nvPr>
-            <p:ph type="sldNum" idx="5" sz="quarter"/>
+            <p:ph type="sldNum" sz="quarter" idx="5"/>
           </p:nvPr>
         </p:nvSpPr>
         <p:spPr/>
@@ -675,7 +468,7 @@
 </file>
 
 <file path=ppt/notesSlides/notesSlide4.xml><?xml version="1.0" encoding="utf-8"?>
-<p:notes xmlns:a="http://schemas.openxmlformats.org/drawingml/2006/main" xmlns:p="http://schemas.openxmlformats.org/presentationml/2006/main" xmlns:r="http://schemas.openxmlformats.org/officeDocument/2006/relationships">
+<p:notes xmlns:a="http://schemas.openxmlformats.org/drawingml/2006/main" xmlns:r="http://schemas.openxmlformats.org/officeDocument/2006/relationships" xmlns:p="http://schemas.openxmlformats.org/presentationml/2006/main">
   <p:cSld>
     <p:spTree>
       <p:nvGrpSpPr>
@@ -695,7 +488,7 @@
         <p:nvSpPr>
           <p:cNvPr id="2" name="Slide Image Placeholder 1"/>
           <p:cNvSpPr>
-            <a:spLocks noGrp="1"/>
+            <a:spLocks noGrp="1" noRot="1" noChangeAspect="1"/>
           </p:cNvSpPr>
           <p:nvPr>
             <p:ph type="sldImg" idx="2"/>
@@ -710,7 +503,7 @@
             <a:spLocks noGrp="1"/>
           </p:cNvSpPr>
           <p:nvPr>
-            <p:ph type="body" idx="3" sz="quarter"/>
+            <p:ph type="body" sz="quarter" idx="3"/>
           </p:nvPr>
         </p:nvSpPr>
         <p:spPr/>
@@ -722,7 +515,9 @@
               <a:t>The honest reading of this chart is the second bullet. Of what is left, roughly eight securities in ten are blocked on data we have formally requested, and two in ten are work we have scoped but not started. That distinction is the whole message of this meeting.</a:t>
             </a:r>
           </a:p>
-          <a:p/>
+          <a:p>
+            <a:endParaRPr/>
+          </a:p>
           <a:p>
             <a:r>
               <a:t>For reference:</a:t>
@@ -762,7 +557,7 @@
             <a:spLocks noGrp="1"/>
           </p:cNvSpPr>
           <p:nvPr>
-            <p:ph type="sldNum" idx="5" sz="quarter"/>
+            <p:ph type="sldNum" sz="quarter" idx="5"/>
           </p:nvPr>
         </p:nvSpPr>
         <p:spPr/>
@@ -776,7 +571,7 @@
 </file>
 
 <file path=ppt/notesSlides/notesSlide5.xml><?xml version="1.0" encoding="utf-8"?>
-<p:notes xmlns:a="http://schemas.openxmlformats.org/drawingml/2006/main" xmlns:p="http://schemas.openxmlformats.org/presentationml/2006/main" xmlns:r="http://schemas.openxmlformats.org/officeDocument/2006/relationships">
+<p:notes xmlns:a="http://schemas.openxmlformats.org/drawingml/2006/main" xmlns:r="http://schemas.openxmlformats.org/officeDocument/2006/relationships" xmlns:p="http://schemas.openxmlformats.org/presentationml/2006/main">
   <p:cSld>
     <p:spTree>
       <p:nvGrpSpPr>
@@ -796,7 +591,7 @@
         <p:nvSpPr>
           <p:cNvPr id="2" name="Slide Image Placeholder 1"/>
           <p:cNvSpPr>
-            <a:spLocks noGrp="1"/>
+            <a:spLocks noGrp="1" noRot="1" noChangeAspect="1"/>
           </p:cNvSpPr>
           <p:nvPr>
             <p:ph type="sldImg" idx="2"/>
@@ -811,7 +606,7 @@
             <a:spLocks noGrp="1"/>
           </p:cNvSpPr>
           <p:nvPr>
-            <p:ph type="body" idx="3" sz="quarter"/>
+            <p:ph type="body" sz="quarter" idx="3"/>
           </p:nvPr>
         </p:nvSpPr>
         <p:spPr/>
@@ -832,7 +627,7 @@
             <a:spLocks noGrp="1"/>
           </p:cNvSpPr>
           <p:nvPr>
-            <p:ph type="sldNum" idx="5" sz="quarter"/>
+            <p:ph type="sldNum" sz="quarter" idx="5"/>
           </p:nvPr>
         </p:nvSpPr>
         <p:spPr/>
@@ -846,7 +641,7 @@
 </file>
 
 <file path=ppt/notesSlides/notesSlide6.xml><?xml version="1.0" encoding="utf-8"?>
-<p:notes xmlns:a="http://schemas.openxmlformats.org/drawingml/2006/main" xmlns:p="http://schemas.openxmlformats.org/presentationml/2006/main" xmlns:r="http://schemas.openxmlformats.org/officeDocument/2006/relationships">
+<p:notes xmlns:a="http://schemas.openxmlformats.org/drawingml/2006/main" xmlns:r="http://schemas.openxmlformats.org/officeDocument/2006/relationships" xmlns:p="http://schemas.openxmlformats.org/presentationml/2006/main">
   <p:cSld>
     <p:spTree>
       <p:nvGrpSpPr>
@@ -866,7 +661,7 @@
         <p:nvSpPr>
           <p:cNvPr id="2" name="Slide Image Placeholder 1"/>
           <p:cNvSpPr>
-            <a:spLocks noGrp="1"/>
+            <a:spLocks noGrp="1" noRot="1" noChangeAspect="1"/>
           </p:cNvSpPr>
           <p:nvPr>
             <p:ph type="sldImg" idx="2"/>
@@ -881,7 +676,7 @@
             <a:spLocks noGrp="1"/>
           </p:cNvSpPr>
           <p:nvPr>
-            <p:ph type="body" idx="3" sz="quarter"/>
+            <p:ph type="body" sz="quarter" idx="3"/>
           </p:nvPr>
         </p:nvSpPr>
         <p:spPr/>
@@ -890,7 +685,7 @@
           <a:lstStyle/>
           <a:p>
             <a:r>
-              <a:t>This is the slide we would most like you to remember. There is no technical obstacle and no disagreement about what is needed. Four in ten securities in this portfolio become priceable on work that is already finished, as soon as the terms arrive. BEFORE PRESENTING, REPLACE THE THIRD BULLET. As of 19 September we had word the data may just have been delivered, unverified. Use whichever is true on the day. If it has NOT arrived: "Requested 22 July 2026 — still outstanding." The ask is that you help move it. If it HAS arrived: "Requested 22 July; the data reached us in September and we are loading it now." That is the better version of this slide — the engine was built ahead of the data and the largest remaining block is unlocking rather than stuck. Do not leave the outstanding wording standing once it is false. An investor who later learns the data had already arrived will discount everything else on these slides. Say all of this without blame either way. The request went to the client; we are surfacing it, not escalating it. If asked why it took this long, the honest answer is we do not know.</a:t>
+              <a:t>Be straight that the 412 is genuine remaining work, not a data problem. What makes it tractable is that the hard parts — the cash-flow machinery, the option model, the market data plumbing — are built and proven on the 766.</a:t>
             </a:r>
           </a:p>
         </p:txBody>
@@ -902,7 +697,7 @@
             <a:spLocks noGrp="1"/>
           </p:cNvSpPr>
           <p:nvPr>
-            <p:ph type="sldNum" idx="5" sz="quarter"/>
+            <p:ph type="sldNum" sz="quarter" idx="5"/>
           </p:nvPr>
         </p:nvSpPr>
         <p:spPr/>
@@ -916,7 +711,7 @@
 </file>
 
 <file path=ppt/notesSlides/notesSlide7.xml><?xml version="1.0" encoding="utf-8"?>
-<p:notes xmlns:a="http://schemas.openxmlformats.org/drawingml/2006/main" xmlns:p="http://schemas.openxmlformats.org/presentationml/2006/main" xmlns:r="http://schemas.openxmlformats.org/officeDocument/2006/relationships">
+<p:notes xmlns:a="http://schemas.openxmlformats.org/drawingml/2006/main" xmlns:r="http://schemas.openxmlformats.org/officeDocument/2006/relationships" xmlns:p="http://schemas.openxmlformats.org/presentationml/2006/main">
   <p:cSld>
     <p:spTree>
       <p:nvGrpSpPr>
@@ -936,7 +731,7 @@
         <p:nvSpPr>
           <p:cNvPr id="2" name="Slide Image Placeholder 1"/>
           <p:cNvSpPr>
-            <a:spLocks noGrp="1"/>
+            <a:spLocks noGrp="1" noRot="1" noChangeAspect="1"/>
           </p:cNvSpPr>
           <p:nvPr>
             <p:ph type="sldImg" idx="2"/>
@@ -951,7 +746,7 @@
             <a:spLocks noGrp="1"/>
           </p:cNvSpPr>
           <p:nvPr>
-            <p:ph type="body" idx="3" sz="quarter"/>
+            <p:ph type="body" sz="quarter" idx="3"/>
           </p:nvPr>
         </p:nvSpPr>
         <p:spPr/>
@@ -960,7 +755,7 @@
           <a:lstStyle/>
           <a:p>
             <a:r>
-              <a:t>Be straight that the 412 is genuine remaining work, not a data problem. What makes it tractable is that the hard parts — the cash-flow machinery, the option model, the market data plumbing — are built and proven on the 766.</a:t>
+              <a:t>This matters commercially. The deliverable is not a service they have to keep buying; it is an asset they own and can run. That was the brief and it is met.</a:t>
             </a:r>
           </a:p>
         </p:txBody>
@@ -972,77 +767,7 @@
             <a:spLocks noGrp="1"/>
           </p:cNvSpPr>
           <p:nvPr>
-            <p:ph type="sldNum" idx="5" sz="quarter"/>
-          </p:nvPr>
-        </p:nvSpPr>
-        <p:spPr/>
-      </p:sp>
-    </p:spTree>
-  </p:cSld>
-  <p:clrMapOvr>
-    <a:masterClrMapping/>
-  </p:clrMapOvr>
-</p:notes>
-</file>
-
-<file path=ppt/notesSlides/notesSlide8.xml><?xml version="1.0" encoding="utf-8"?>
-<p:notes xmlns:a="http://schemas.openxmlformats.org/drawingml/2006/main" xmlns:p="http://schemas.openxmlformats.org/presentationml/2006/main" xmlns:r="http://schemas.openxmlformats.org/officeDocument/2006/relationships">
-  <p:cSld>
-    <p:spTree>
-      <p:nvGrpSpPr>
-        <p:cNvPr id="1" name=""/>
-        <p:cNvGrpSpPr/>
-        <p:nvPr/>
-      </p:nvGrpSpPr>
-      <p:grpSpPr>
-        <a:xfrm>
-          <a:off x="0" y="0"/>
-          <a:ext cx="0" cy="0"/>
-          <a:chOff x="0" y="0"/>
-          <a:chExt cx="0" cy="0"/>
-        </a:xfrm>
-      </p:grpSpPr>
-      <p:sp>
-        <p:nvSpPr>
-          <p:cNvPr id="2" name="Slide Image Placeholder 1"/>
-          <p:cNvSpPr>
-            <a:spLocks noGrp="1"/>
-          </p:cNvSpPr>
-          <p:nvPr>
-            <p:ph type="sldImg" idx="2"/>
-          </p:nvPr>
-        </p:nvSpPr>
-        <p:spPr/>
-      </p:sp>
-      <p:sp>
-        <p:nvSpPr>
-          <p:cNvPr id="3" name="Notes Placeholder 2"/>
-          <p:cNvSpPr>
-            <a:spLocks noGrp="1"/>
-          </p:cNvSpPr>
-          <p:nvPr>
-            <p:ph type="body" idx="3" sz="quarter"/>
-          </p:nvPr>
-        </p:nvSpPr>
-        <p:spPr/>
-        <p:txBody>
-          <a:bodyPr/>
-          <a:lstStyle/>
-          <a:p>
-            <a:r>
-              <a:t>This matters commercially. The deliverable is not a service they have to keep buying; it is an asset they own and can run. That was the brief and it is met.</a:t>
-            </a:r>
-          </a:p>
-        </p:txBody>
-      </p:sp>
-      <p:sp>
-        <p:nvSpPr>
-          <p:cNvPr id="4" name="Slide Number Placeholder 3"/>
-          <p:cNvSpPr>
-            <a:spLocks noGrp="1"/>
-          </p:cNvSpPr>
-          <p:nvPr>
-            <p:ph type="sldNum" idx="5" sz="quarter"/>
+            <p:ph type="sldNum" sz="quarter" idx="5"/>
           </p:nvPr>
         </p:nvSpPr>
         <p:spPr/>
@@ -1093,10 +818,9 @@
           <a:lstStyle/>
           <a:p>
             <a:r>
-              <a:rPr lang="en-US" smtClean="0"/>
+              <a:rPr lang="en-US"/>
               <a:t>Click to edit Master title style</a:t>
             </a:r>
-            <a:endParaRPr lang="en-US"/>
           </a:p>
         </p:txBody>
       </p:sp>
@@ -1212,10 +936,9 @@
           </a:lstStyle>
           <a:p>
             <a:r>
-              <a:rPr lang="en-US" smtClean="0"/>
+              <a:rPr lang="en-US"/>
               <a:t>Click to edit Master subtitle style</a:t>
             </a:r>
-            <a:endParaRPr lang="en-US"/>
           </a:p>
         </p:txBody>
       </p:sp>
@@ -1236,7 +959,7 @@
           <a:p>
             <a:fld id="{5BCAD085-E8A6-8845-BD4E-CB4CCA059FC4}" type="datetimeFigureOut">
               <a:rPr lang="en-US" smtClean="0"/>
-              <a:t>1/27/13</a:t>
+              <a:t>9/21/2026</a:t>
             </a:fld>
             <a:endParaRPr lang="en-US"/>
           </a:p>
@@ -1330,10 +1053,9 @@
           <a:lstStyle/>
           <a:p>
             <a:r>
-              <a:rPr lang="en-US" smtClean="0"/>
+              <a:rPr lang="en-US"/>
               <a:t>Click to edit Master title style</a:t>
             </a:r>
-            <a:endParaRPr lang="en-US"/>
           </a:p>
         </p:txBody>
       </p:sp>
@@ -1354,38 +1076,37 @@
           <a:p>
             <a:pPr lvl="0"/>
             <a:r>
-              <a:rPr lang="en-US" smtClean="0"/>
+              <a:rPr lang="en-US"/>
               <a:t>Click to edit Master text styles</a:t>
             </a:r>
           </a:p>
           <a:p>
             <a:pPr lvl="1"/>
             <a:r>
-              <a:rPr lang="en-US" smtClean="0"/>
+              <a:rPr lang="en-US"/>
               <a:t>Second level</a:t>
             </a:r>
           </a:p>
           <a:p>
             <a:pPr lvl="2"/>
             <a:r>
-              <a:rPr lang="en-US" smtClean="0"/>
+              <a:rPr lang="en-US"/>
               <a:t>Third level</a:t>
             </a:r>
           </a:p>
           <a:p>
             <a:pPr lvl="3"/>
             <a:r>
-              <a:rPr lang="en-US" smtClean="0"/>
+              <a:rPr lang="en-US"/>
               <a:t>Fourth level</a:t>
             </a:r>
           </a:p>
           <a:p>
             <a:pPr lvl="4"/>
             <a:r>
-              <a:rPr lang="en-US" smtClean="0"/>
+              <a:rPr lang="en-US"/>
               <a:t>Fifth level</a:t>
             </a:r>
-            <a:endParaRPr lang="en-US"/>
           </a:p>
         </p:txBody>
       </p:sp>
@@ -1406,7 +1127,7 @@
           <a:p>
             <a:fld id="{5BCAD085-E8A6-8845-BD4E-CB4CCA059FC4}" type="datetimeFigureOut">
               <a:rPr lang="en-US" smtClean="0"/>
-              <a:t>1/27/13</a:t>
+              <a:t>9/21/2026</a:t>
             </a:fld>
             <a:endParaRPr lang="en-US"/>
           </a:p>
@@ -1505,10 +1226,9 @@
           <a:lstStyle/>
           <a:p>
             <a:r>
-              <a:rPr lang="en-US" smtClean="0"/>
+              <a:rPr lang="en-US"/>
               <a:t>Click to edit Master title style</a:t>
             </a:r>
-            <a:endParaRPr lang="en-US"/>
           </a:p>
         </p:txBody>
       </p:sp>
@@ -1534,38 +1254,37 @@
           <a:p>
             <a:pPr lvl="0"/>
             <a:r>
-              <a:rPr lang="en-US" smtClean="0"/>
+              <a:rPr lang="en-US"/>
               <a:t>Click to edit Master text styles</a:t>
             </a:r>
           </a:p>
           <a:p>
             <a:pPr lvl="1"/>
             <a:r>
-              <a:rPr lang="en-US" smtClean="0"/>
+              <a:rPr lang="en-US"/>
               <a:t>Second level</a:t>
             </a:r>
           </a:p>
           <a:p>
             <a:pPr lvl="2"/>
             <a:r>
-              <a:rPr lang="en-US" smtClean="0"/>
+              <a:rPr lang="en-US"/>
               <a:t>Third level</a:t>
             </a:r>
           </a:p>
           <a:p>
             <a:pPr lvl="3"/>
             <a:r>
-              <a:rPr lang="en-US" smtClean="0"/>
+              <a:rPr lang="en-US"/>
               <a:t>Fourth level</a:t>
             </a:r>
           </a:p>
           <a:p>
             <a:pPr lvl="4"/>
             <a:r>
-              <a:rPr lang="en-US" smtClean="0"/>
+              <a:rPr lang="en-US"/>
               <a:t>Fifth level</a:t>
             </a:r>
-            <a:endParaRPr lang="en-US"/>
           </a:p>
         </p:txBody>
       </p:sp>
@@ -1586,7 +1305,7 @@
           <a:p>
             <a:fld id="{5BCAD085-E8A6-8845-BD4E-CB4CCA059FC4}" type="datetimeFigureOut">
               <a:rPr lang="en-US" smtClean="0"/>
-              <a:t>1/27/13</a:t>
+              <a:t>9/21/2026</a:t>
             </a:fld>
             <a:endParaRPr lang="en-US"/>
           </a:p>
@@ -1680,10 +1399,9 @@
           <a:lstStyle/>
           <a:p>
             <a:r>
-              <a:rPr lang="en-US" smtClean="0"/>
+              <a:rPr lang="en-US"/>
               <a:t>Click to edit Master title style</a:t>
             </a:r>
-            <a:endParaRPr lang="en-US"/>
           </a:p>
         </p:txBody>
       </p:sp>
@@ -1704,38 +1422,37 @@
           <a:p>
             <a:pPr lvl="0"/>
             <a:r>
-              <a:rPr lang="en-US" smtClean="0"/>
+              <a:rPr lang="en-US"/>
               <a:t>Click to edit Master text styles</a:t>
             </a:r>
           </a:p>
           <a:p>
             <a:pPr lvl="1"/>
             <a:r>
-              <a:rPr lang="en-US" smtClean="0"/>
+              <a:rPr lang="en-US"/>
               <a:t>Second level</a:t>
             </a:r>
           </a:p>
           <a:p>
             <a:pPr lvl="2"/>
             <a:r>
-              <a:rPr lang="en-US" smtClean="0"/>
+              <a:rPr lang="en-US"/>
               <a:t>Third level</a:t>
             </a:r>
           </a:p>
           <a:p>
             <a:pPr lvl="3"/>
             <a:r>
-              <a:rPr lang="en-US" smtClean="0"/>
+              <a:rPr lang="en-US"/>
               <a:t>Fourth level</a:t>
             </a:r>
           </a:p>
           <a:p>
             <a:pPr lvl="4"/>
             <a:r>
-              <a:rPr lang="en-US" smtClean="0"/>
+              <a:rPr lang="en-US"/>
               <a:t>Fifth level</a:t>
             </a:r>
-            <a:endParaRPr lang="en-US"/>
           </a:p>
         </p:txBody>
       </p:sp>
@@ -1756,7 +1473,7 @@
           <a:p>
             <a:fld id="{5BCAD085-E8A6-8845-BD4E-CB4CCA059FC4}" type="datetimeFigureOut">
               <a:rPr lang="en-US" smtClean="0"/>
-              <a:t>1/27/13</a:t>
+              <a:t>9/21/2026</a:t>
             </a:fld>
             <a:endParaRPr lang="en-US"/>
           </a:p>
@@ -1859,10 +1576,9 @@
           </a:lstStyle>
           <a:p>
             <a:r>
-              <a:rPr lang="en-US" smtClean="0"/>
+              <a:rPr lang="en-US"/>
               <a:t>Click to edit Master title style</a:t>
             </a:r>
-            <a:endParaRPr lang="en-US"/>
           </a:p>
         </p:txBody>
       </p:sp>
@@ -1979,7 +1695,7 @@
           <a:p>
             <a:pPr lvl="0"/>
             <a:r>
-              <a:rPr lang="en-US" smtClean="0"/>
+              <a:rPr lang="en-US"/>
               <a:t>Click to edit Master text styles</a:t>
             </a:r>
           </a:p>
@@ -2002,7 +1718,7 @@
           <a:p>
             <a:fld id="{5BCAD085-E8A6-8845-BD4E-CB4CCA059FC4}" type="datetimeFigureOut">
               <a:rPr lang="en-US" smtClean="0"/>
-              <a:t>1/27/13</a:t>
+              <a:t>9/21/2026</a:t>
             </a:fld>
             <a:endParaRPr lang="en-US"/>
           </a:p>
@@ -2096,10 +1812,9 @@
           <a:lstStyle/>
           <a:p>
             <a:r>
-              <a:rPr lang="en-US" smtClean="0"/>
+              <a:rPr lang="en-US"/>
               <a:t>Click to edit Master title style</a:t>
             </a:r>
-            <a:endParaRPr lang="en-US"/>
           </a:p>
         </p:txBody>
       </p:sp>
@@ -2153,38 +1868,37 @@
           <a:p>
             <a:pPr lvl="0"/>
             <a:r>
-              <a:rPr lang="en-US" smtClean="0"/>
+              <a:rPr lang="en-US"/>
               <a:t>Click to edit Master text styles</a:t>
             </a:r>
           </a:p>
           <a:p>
             <a:pPr lvl="1"/>
             <a:r>
-              <a:rPr lang="en-US" smtClean="0"/>
+              <a:rPr lang="en-US"/>
               <a:t>Second level</a:t>
             </a:r>
           </a:p>
           <a:p>
             <a:pPr lvl="2"/>
             <a:r>
-              <a:rPr lang="en-US" smtClean="0"/>
+              <a:rPr lang="en-US"/>
               <a:t>Third level</a:t>
             </a:r>
           </a:p>
           <a:p>
             <a:pPr lvl="3"/>
             <a:r>
-              <a:rPr lang="en-US" smtClean="0"/>
+              <a:rPr lang="en-US"/>
               <a:t>Fourth level</a:t>
             </a:r>
           </a:p>
           <a:p>
             <a:pPr lvl="4"/>
             <a:r>
-              <a:rPr lang="en-US" smtClean="0"/>
+              <a:rPr lang="en-US"/>
               <a:t>Fifth level</a:t>
             </a:r>
-            <a:endParaRPr lang="en-US"/>
           </a:p>
         </p:txBody>
       </p:sp>
@@ -2238,38 +1952,37 @@
           <a:p>
             <a:pPr lvl="0"/>
             <a:r>
-              <a:rPr lang="en-US" smtClean="0"/>
+              <a:rPr lang="en-US"/>
               <a:t>Click to edit Master text styles</a:t>
             </a:r>
           </a:p>
           <a:p>
             <a:pPr lvl="1"/>
             <a:r>
-              <a:rPr lang="en-US" smtClean="0"/>
+              <a:rPr lang="en-US"/>
               <a:t>Second level</a:t>
             </a:r>
           </a:p>
           <a:p>
             <a:pPr lvl="2"/>
             <a:r>
-              <a:rPr lang="en-US" smtClean="0"/>
+              <a:rPr lang="en-US"/>
               <a:t>Third level</a:t>
             </a:r>
           </a:p>
           <a:p>
             <a:pPr lvl="3"/>
             <a:r>
-              <a:rPr lang="en-US" smtClean="0"/>
+              <a:rPr lang="en-US"/>
               <a:t>Fourth level</a:t>
             </a:r>
           </a:p>
           <a:p>
             <a:pPr lvl="4"/>
             <a:r>
-              <a:rPr lang="en-US" smtClean="0"/>
+              <a:rPr lang="en-US"/>
               <a:t>Fifth level</a:t>
             </a:r>
-            <a:endParaRPr lang="en-US"/>
           </a:p>
         </p:txBody>
       </p:sp>
@@ -2290,7 +2003,7 @@
           <a:p>
             <a:fld id="{5BCAD085-E8A6-8845-BD4E-CB4CCA059FC4}" type="datetimeFigureOut">
               <a:rPr lang="en-US" smtClean="0"/>
-              <a:t>1/27/13</a:t>
+              <a:t>9/21/2026</a:t>
             </a:fld>
             <a:endParaRPr lang="en-US"/>
           </a:p>
@@ -2388,10 +2101,9 @@
           </a:lstStyle>
           <a:p>
             <a:r>
-              <a:rPr lang="en-US" smtClean="0"/>
+              <a:rPr lang="en-US"/>
               <a:t>Click to edit Master title style</a:t>
             </a:r>
-            <a:endParaRPr lang="en-US"/>
           </a:p>
         </p:txBody>
       </p:sp>
@@ -2454,7 +2166,7 @@
           <a:p>
             <a:pPr lvl="0"/>
             <a:r>
-              <a:rPr lang="en-US" smtClean="0"/>
+              <a:rPr lang="en-US"/>
               <a:t>Click to edit Master text styles</a:t>
             </a:r>
           </a:p>
@@ -2510,38 +2222,37 @@
           <a:p>
             <a:pPr lvl="0"/>
             <a:r>
-              <a:rPr lang="en-US" smtClean="0"/>
+              <a:rPr lang="en-US"/>
               <a:t>Click to edit Master text styles</a:t>
             </a:r>
           </a:p>
           <a:p>
             <a:pPr lvl="1"/>
             <a:r>
-              <a:rPr lang="en-US" smtClean="0"/>
+              <a:rPr lang="en-US"/>
               <a:t>Second level</a:t>
             </a:r>
           </a:p>
           <a:p>
             <a:pPr lvl="2"/>
             <a:r>
-              <a:rPr lang="en-US" smtClean="0"/>
+              <a:rPr lang="en-US"/>
               <a:t>Third level</a:t>
             </a:r>
           </a:p>
           <a:p>
             <a:pPr lvl="3"/>
             <a:r>
-              <a:rPr lang="en-US" smtClean="0"/>
+              <a:rPr lang="en-US"/>
               <a:t>Fourth level</a:t>
             </a:r>
           </a:p>
           <a:p>
             <a:pPr lvl="4"/>
             <a:r>
-              <a:rPr lang="en-US" smtClean="0"/>
+              <a:rPr lang="en-US"/>
               <a:t>Fifth level</a:t>
             </a:r>
-            <a:endParaRPr lang="en-US"/>
           </a:p>
         </p:txBody>
       </p:sp>
@@ -2604,7 +2315,7 @@
           <a:p>
             <a:pPr lvl="0"/>
             <a:r>
-              <a:rPr lang="en-US" smtClean="0"/>
+              <a:rPr lang="en-US"/>
               <a:t>Click to edit Master text styles</a:t>
             </a:r>
           </a:p>
@@ -2660,38 +2371,37 @@
           <a:p>
             <a:pPr lvl="0"/>
             <a:r>
-              <a:rPr lang="en-US" smtClean="0"/>
+              <a:rPr lang="en-US"/>
               <a:t>Click to edit Master text styles</a:t>
             </a:r>
           </a:p>
           <a:p>
             <a:pPr lvl="1"/>
             <a:r>
-              <a:rPr lang="en-US" smtClean="0"/>
+              <a:rPr lang="en-US"/>
               <a:t>Second level</a:t>
             </a:r>
           </a:p>
           <a:p>
             <a:pPr lvl="2"/>
             <a:r>
-              <a:rPr lang="en-US" smtClean="0"/>
+              <a:rPr lang="en-US"/>
               <a:t>Third level</a:t>
             </a:r>
           </a:p>
           <a:p>
             <a:pPr lvl="3"/>
             <a:r>
-              <a:rPr lang="en-US" smtClean="0"/>
+              <a:rPr lang="en-US"/>
               <a:t>Fourth level</a:t>
             </a:r>
           </a:p>
           <a:p>
             <a:pPr lvl="4"/>
             <a:r>
-              <a:rPr lang="en-US" smtClean="0"/>
+              <a:rPr lang="en-US"/>
               <a:t>Fifth level</a:t>
             </a:r>
-            <a:endParaRPr lang="en-US"/>
           </a:p>
         </p:txBody>
       </p:sp>
@@ -2712,7 +2422,7 @@
           <a:p>
             <a:fld id="{5BCAD085-E8A6-8845-BD4E-CB4CCA059FC4}" type="datetimeFigureOut">
               <a:rPr lang="en-US" smtClean="0"/>
-              <a:t>1/27/13</a:t>
+              <a:t>9/21/2026</a:t>
             </a:fld>
             <a:endParaRPr lang="en-US"/>
           </a:p>
@@ -2806,10 +2516,9 @@
           <a:lstStyle/>
           <a:p>
             <a:r>
-              <a:rPr lang="en-US" smtClean="0"/>
+              <a:rPr lang="en-US"/>
               <a:t>Click to edit Master title style</a:t>
             </a:r>
-            <a:endParaRPr lang="en-US"/>
           </a:p>
         </p:txBody>
       </p:sp>
@@ -2830,7 +2539,7 @@
           <a:p>
             <a:fld id="{5BCAD085-E8A6-8845-BD4E-CB4CCA059FC4}" type="datetimeFigureOut">
               <a:rPr lang="en-US" smtClean="0"/>
-              <a:t>1/27/13</a:t>
+              <a:t>9/21/2026</a:t>
             </a:fld>
             <a:endParaRPr lang="en-US"/>
           </a:p>
@@ -2925,7 +2634,7 @@
           <a:p>
             <a:fld id="{5BCAD085-E8A6-8845-BD4E-CB4CCA059FC4}" type="datetimeFigureOut">
               <a:rPr lang="en-US" smtClean="0"/>
-              <a:t>1/27/13</a:t>
+              <a:t>9/21/2026</a:t>
             </a:fld>
             <a:endParaRPr lang="en-US"/>
           </a:p>
@@ -3028,10 +2737,9 @@
           </a:lstStyle>
           <a:p>
             <a:r>
-              <a:rPr lang="en-US" smtClean="0"/>
+              <a:rPr lang="en-US"/>
               <a:t>Click to edit Master title style</a:t>
             </a:r>
-            <a:endParaRPr lang="en-US"/>
           </a:p>
         </p:txBody>
       </p:sp>
@@ -3085,38 +2793,37 @@
           <a:p>
             <a:pPr lvl="0"/>
             <a:r>
-              <a:rPr lang="en-US" smtClean="0"/>
+              <a:rPr lang="en-US"/>
               <a:t>Click to edit Master text styles</a:t>
             </a:r>
           </a:p>
           <a:p>
             <a:pPr lvl="1"/>
             <a:r>
-              <a:rPr lang="en-US" smtClean="0"/>
+              <a:rPr lang="en-US"/>
               <a:t>Second level</a:t>
             </a:r>
           </a:p>
           <a:p>
             <a:pPr lvl="2"/>
             <a:r>
-              <a:rPr lang="en-US" smtClean="0"/>
+              <a:rPr lang="en-US"/>
               <a:t>Third level</a:t>
             </a:r>
           </a:p>
           <a:p>
             <a:pPr lvl="3"/>
             <a:r>
-              <a:rPr lang="en-US" smtClean="0"/>
+              <a:rPr lang="en-US"/>
               <a:t>Fourth level</a:t>
             </a:r>
           </a:p>
           <a:p>
             <a:pPr lvl="4"/>
             <a:r>
-              <a:rPr lang="en-US" smtClean="0"/>
+              <a:rPr lang="en-US"/>
               <a:t>Fifth level</a:t>
             </a:r>
-            <a:endParaRPr lang="en-US"/>
           </a:p>
         </p:txBody>
       </p:sp>
@@ -3179,7 +2886,7 @@
           <a:p>
             <a:pPr lvl="0"/>
             <a:r>
-              <a:rPr lang="en-US" smtClean="0"/>
+              <a:rPr lang="en-US"/>
               <a:t>Click to edit Master text styles</a:t>
             </a:r>
           </a:p>
@@ -3202,7 +2909,7 @@
           <a:p>
             <a:fld id="{5BCAD085-E8A6-8845-BD4E-CB4CCA059FC4}" type="datetimeFigureOut">
               <a:rPr lang="en-US" smtClean="0"/>
-              <a:t>1/27/13</a:t>
+              <a:t>9/21/2026</a:t>
             </a:fld>
             <a:endParaRPr lang="en-US"/>
           </a:p>
@@ -3305,10 +3012,9 @@
           </a:lstStyle>
           <a:p>
             <a:r>
-              <a:rPr lang="en-US" smtClean="0"/>
+              <a:rPr lang="en-US"/>
               <a:t>Click to edit Master title style</a:t>
             </a:r>
-            <a:endParaRPr lang="en-US"/>
           </a:p>
         </p:txBody>
       </p:sp>
@@ -3432,7 +3138,7 @@
           <a:p>
             <a:pPr lvl="0"/>
             <a:r>
-              <a:rPr lang="en-US" smtClean="0"/>
+              <a:rPr lang="en-US"/>
               <a:t>Click to edit Master text styles</a:t>
             </a:r>
           </a:p>
@@ -3455,7 +3161,7 @@
           <a:p>
             <a:fld id="{5BCAD085-E8A6-8845-BD4E-CB4CCA059FC4}" type="datetimeFigureOut">
               <a:rPr lang="en-US" smtClean="0"/>
-              <a:t>1/27/13</a:t>
+              <a:t>9/21/2026</a:t>
             </a:fld>
             <a:endParaRPr lang="en-US"/>
           </a:p>
@@ -3564,10 +3270,9 @@
           <a:lstStyle/>
           <a:p>
             <a:r>
-              <a:rPr lang="en-US" smtClean="0"/>
+              <a:rPr lang="en-US"/>
               <a:t>Click to edit Master title style</a:t>
             </a:r>
-            <a:endParaRPr lang="en-US"/>
           </a:p>
         </p:txBody>
       </p:sp>
@@ -3598,38 +3303,37 @@
           <a:p>
             <a:pPr lvl="0"/>
             <a:r>
-              <a:rPr lang="en-US" smtClean="0"/>
+              <a:rPr lang="en-US"/>
               <a:t>Click to edit Master text styles</a:t>
             </a:r>
           </a:p>
           <a:p>
             <a:pPr lvl="1"/>
             <a:r>
-              <a:rPr lang="en-US" smtClean="0"/>
+              <a:rPr lang="en-US"/>
               <a:t>Second level</a:t>
             </a:r>
           </a:p>
           <a:p>
             <a:pPr lvl="2"/>
             <a:r>
-              <a:rPr lang="en-US" smtClean="0"/>
+              <a:rPr lang="en-US"/>
               <a:t>Third level</a:t>
             </a:r>
           </a:p>
           <a:p>
             <a:pPr lvl="3"/>
             <a:r>
-              <a:rPr lang="en-US" smtClean="0"/>
+              <a:rPr lang="en-US"/>
               <a:t>Fourth level</a:t>
             </a:r>
           </a:p>
           <a:p>
             <a:pPr lvl="4"/>
             <a:r>
-              <a:rPr lang="en-US" smtClean="0"/>
+              <a:rPr lang="en-US"/>
               <a:t>Fifth level</a:t>
             </a:r>
-            <a:endParaRPr lang="en-US"/>
           </a:p>
         </p:txBody>
       </p:sp>
@@ -3668,7 +3372,7 @@
           <a:p>
             <a:fld id="{5BCAD085-E8A6-8845-BD4E-CB4CCA059FC4}" type="datetimeFigureOut">
               <a:rPr lang="en-US" smtClean="0"/>
-              <a:t>1/27/13</a:t>
+              <a:t>9/21/2026</a:t>
             </a:fld>
             <a:endParaRPr lang="en-US"/>
           </a:p>
@@ -4027,7 +3731,7 @@
 </file>
 
 <file path=ppt/slides/slide1.xml><?xml version="1.0" encoding="utf-8"?>
-<p:sld xmlns:a="http://schemas.openxmlformats.org/drawingml/2006/main" xmlns:p="http://schemas.openxmlformats.org/presentationml/2006/main" xmlns:r="http://schemas.openxmlformats.org/officeDocument/2006/relationships">
+<p:sld xmlns:a="http://schemas.openxmlformats.org/drawingml/2006/main" xmlns:r="http://schemas.openxmlformats.org/officeDocument/2006/relationships" xmlns:p="http://schemas.openxmlformats.org/presentationml/2006/main">
   <p:cSld>
     <p:spTree>
       <p:nvGrpSpPr>
@@ -4035,7 +3739,14 @@
         <p:cNvGrpSpPr/>
         <p:nvPr/>
       </p:nvGrpSpPr>
-      <p:grpSpPr/>
+      <p:grpSpPr>
+        <a:xfrm>
+          <a:off x="0" y="0"/>
+          <a:ext cx="0" cy="0"/>
+          <a:chOff x="0" y="0"/>
+          <a:chExt cx="0" cy="0"/>
+        </a:xfrm>
+      </p:grpSpPr>
       <p:sp>
         <p:nvSpPr>
           <p:cNvPr id="2" name="TextBox 1"/>
@@ -4083,7 +3794,7 @@
         <p:spPr>
           <a:xfrm>
             <a:off x="731520" y="3063240"/>
-            <a:ext cx="10728655" cy="3246120"/>
+            <a:ext cx="10728655" cy="1282402"/>
           </a:xfrm>
           <a:prstGeom prst="rect">
             <a:avLst/>
@@ -4102,7 +3813,7 @@
               </a:spcAft>
             </a:pPr>
             <a:r>
-              <a:rPr sz="1800" b="0">
+              <a:rPr sz="1800" b="0" dirty="0">
                 <a:solidFill>
                   <a:srgbClr val="707070"/>
                 </a:solidFill>
@@ -4117,13 +3828,50 @@
               </a:spcAft>
             </a:pPr>
             <a:r>
-              <a:rPr sz="1800" b="0">
+              <a:rPr sz="1800" b="0" dirty="0">
                 <a:solidFill>
                   <a:srgbClr val="707070"/>
                 </a:solidFill>
               </a:rPr>
-              <a:t>•  Presented by [YOUR NAME] and Mario [SURNAME] — fill these in</a:t>
-            </a:r>
+              <a:t>•  Presented by </a:t>
+            </a:r>
+            <a:r>
+              <a:rPr lang="en-US" dirty="0">
+                <a:solidFill>
+                  <a:srgbClr val="707070"/>
+                </a:solidFill>
+              </a:rPr>
+              <a:t>L</a:t>
+            </a:r>
+            <a:r>
+              <a:rPr lang="en-US" altLang="zh-CN" dirty="0">
+                <a:solidFill>
+                  <a:srgbClr val="707070"/>
+                </a:solidFill>
+              </a:rPr>
+              <a:t>ichen Chen</a:t>
+            </a:r>
+            <a:r>
+              <a:rPr sz="1800" b="0" dirty="0">
+                <a:solidFill>
+                  <a:srgbClr val="707070"/>
+                </a:solidFill>
+              </a:rPr>
+              <a:t> and </a:t>
+            </a:r>
+            <a:r>
+              <a:rPr lang="en-US" dirty="0">
+                <a:solidFill>
+                  <a:srgbClr val="707070"/>
+                </a:solidFill>
+              </a:rPr>
+              <a:t>Liping Yin</a:t>
+            </a:r>
+            <a:endParaRPr sz="1800" b="0" dirty="0">
+              <a:solidFill>
+                <a:srgbClr val="707070"/>
+              </a:solidFill>
+            </a:endParaRPr>
           </a:p>
           <a:p>
             <a:pPr>
@@ -4132,7 +3880,7 @@
               </a:spcAft>
             </a:pPr>
             <a:r>
-              <a:rPr sz="1800" b="0">
+              <a:rPr sz="1800" b="0" dirty="0">
                 <a:solidFill>
                   <a:srgbClr val="707070"/>
                 </a:solidFill>
@@ -4151,7 +3899,7 @@
 </file>
 
 <file path=ppt/slides/slide2.xml><?xml version="1.0" encoding="utf-8"?>
-<p:sld xmlns:a="http://schemas.openxmlformats.org/drawingml/2006/main" xmlns:p="http://schemas.openxmlformats.org/presentationml/2006/main" xmlns:r="http://schemas.openxmlformats.org/officeDocument/2006/relationships">
+<p:sld xmlns:a="http://schemas.openxmlformats.org/drawingml/2006/main" xmlns:r="http://schemas.openxmlformats.org/officeDocument/2006/relationships" xmlns:p="http://schemas.openxmlformats.org/presentationml/2006/main">
   <p:cSld>
     <p:spTree>
       <p:nvGrpSpPr>
@@ -4159,7 +3907,14 @@
         <p:cNvGrpSpPr/>
         <p:nvPr/>
       </p:nvGrpSpPr>
-      <p:grpSpPr/>
+      <p:grpSpPr>
+        <a:xfrm>
+          <a:off x="0" y="0"/>
+          <a:ext cx="0" cy="0"/>
+          <a:chOff x="0" y="0"/>
+          <a:chExt cx="0" cy="0"/>
+        </a:xfrm>
+      </p:grpSpPr>
       <p:sp>
         <p:nvSpPr>
           <p:cNvPr id="2" name="TextBox 1"/>
@@ -4307,7 +4062,7 @@
 </file>
 
 <file path=ppt/slides/slide3.xml><?xml version="1.0" encoding="utf-8"?>
-<p:sld xmlns:a="http://schemas.openxmlformats.org/drawingml/2006/main" xmlns:p="http://schemas.openxmlformats.org/presentationml/2006/main" xmlns:r="http://schemas.openxmlformats.org/officeDocument/2006/relationships">
+<p:sld xmlns:a="http://schemas.openxmlformats.org/drawingml/2006/main" xmlns:r="http://schemas.openxmlformats.org/officeDocument/2006/relationships" xmlns:p="http://schemas.openxmlformats.org/presentationml/2006/main">
   <p:cSld>
     <p:spTree>
       <p:nvGrpSpPr>
@@ -4315,7 +4070,14 @@
         <p:cNvGrpSpPr/>
         <p:nvPr/>
       </p:nvGrpSpPr>
-      <p:grpSpPr/>
+      <p:grpSpPr>
+        <a:xfrm>
+          <a:off x="0" y="0"/>
+          <a:ext cx="0" cy="0"/>
+          <a:chOff x="0" y="0"/>
+          <a:chExt cx="0" cy="0"/>
+        </a:xfrm>
+      </p:grpSpPr>
       <p:sp>
         <p:nvSpPr>
           <p:cNvPr id="2" name="TextBox 1"/>
@@ -4502,7 +4264,7 @@
 </file>
 
 <file path=ppt/slides/slide4.xml><?xml version="1.0" encoding="utf-8"?>
-<p:sld xmlns:a="http://schemas.openxmlformats.org/drawingml/2006/main" xmlns:p="http://schemas.openxmlformats.org/presentationml/2006/main" xmlns:r="http://schemas.openxmlformats.org/officeDocument/2006/relationships">
+<p:sld xmlns:a="http://schemas.openxmlformats.org/drawingml/2006/main" xmlns:r="http://schemas.openxmlformats.org/officeDocument/2006/relationships" xmlns:p="http://schemas.openxmlformats.org/presentationml/2006/main">
   <p:cSld>
     <p:spTree>
       <p:nvGrpSpPr>
@@ -4510,7 +4272,14 @@
         <p:cNvGrpSpPr/>
         <p:nvPr/>
       </p:nvGrpSpPr>
-      <p:grpSpPr/>
+      <p:grpSpPr>
+        <a:xfrm>
+          <a:off x="0" y="0"/>
+          <a:ext cx="0" cy="0"/>
+          <a:chOff x="0" y="0"/>
+          <a:chExt cx="0" cy="0"/>
+        </a:xfrm>
+      </p:grpSpPr>
       <p:sp>
         <p:nvSpPr>
           <p:cNvPr id="2" name="TextBox 1"/>
@@ -4558,7 +4327,7 @@
           <p:nvPr/>
         </p:nvPicPr>
         <p:blipFill>
-          <a:blip r:embed="rId2"/>
+          <a:blip r:embed="rId3"/>
           <a:stretch>
             <a:fillRect/>
           </a:stretch>
@@ -4659,7 +4428,7 @@
 </file>
 
 <file path=ppt/slides/slide5.xml><?xml version="1.0" encoding="utf-8"?>
-<p:sld xmlns:a="http://schemas.openxmlformats.org/drawingml/2006/main" xmlns:p="http://schemas.openxmlformats.org/presentationml/2006/main" xmlns:r="http://schemas.openxmlformats.org/officeDocument/2006/relationships">
+<p:sld xmlns:a="http://schemas.openxmlformats.org/drawingml/2006/main" xmlns:r="http://schemas.openxmlformats.org/officeDocument/2006/relationships" xmlns:p="http://schemas.openxmlformats.org/presentationml/2006/main">
   <p:cSld>
     <p:spTree>
       <p:nvGrpSpPr>
@@ -4667,7 +4436,14 @@
         <p:cNvGrpSpPr/>
         <p:nvPr/>
       </p:nvGrpSpPr>
-      <p:grpSpPr/>
+      <p:grpSpPr>
+        <a:xfrm>
+          <a:off x="0" y="0"/>
+          <a:ext cx="0" cy="0"/>
+          <a:chOff x="0" y="0"/>
+          <a:chExt cx="0" cy="0"/>
+        </a:xfrm>
+      </p:grpSpPr>
       <p:sp>
         <p:nvSpPr>
           <p:cNvPr id="2" name="TextBox 1"/>
@@ -4831,7 +4607,7 @@
 </file>
 
 <file path=ppt/slides/slide6.xml><?xml version="1.0" encoding="utf-8"?>
-<p:sld xmlns:a="http://schemas.openxmlformats.org/drawingml/2006/main" xmlns:p="http://schemas.openxmlformats.org/presentationml/2006/main" xmlns:r="http://schemas.openxmlformats.org/officeDocument/2006/relationships">
+<p:sld xmlns:a="http://schemas.openxmlformats.org/drawingml/2006/main" xmlns:r="http://schemas.openxmlformats.org/officeDocument/2006/relationships" xmlns:p="http://schemas.openxmlformats.org/presentationml/2006/main">
   <p:cSld>
     <p:spTree>
       <p:nvGrpSpPr>
@@ -4839,7 +4615,14 @@
         <p:cNvGrpSpPr/>
         <p:nvPr/>
       </p:nvGrpSpPr>
-      <p:grpSpPr/>
+      <p:grpSpPr>
+        <a:xfrm>
+          <a:off x="0" y="0"/>
+          <a:ext cx="0" cy="0"/>
+          <a:chOff x="0" y="0"/>
+          <a:chExt cx="0" cy="0"/>
+        </a:xfrm>
+      </p:grpSpPr>
       <p:sp>
         <p:nvSpPr>
           <p:cNvPr id="2" name="TextBox 1"/>
@@ -4873,7 +4656,7 @@
                   <a:srgbClr val="1F4E79"/>
                 </a:solidFill>
               </a:rPr>
-              <a:t>The one thing blocking the largest block</a:t>
+              <a:t>What is left</a:t>
             </a:r>
           </a:p>
         </p:txBody>
@@ -4919,7 +4702,15 @@
                   <a:srgbClr val="262626"/>
                 </a:solidFill>
               </a:rPr>
-              <a:t>882 mortgage securities — 39% of the portfolio — need terms that only Bloomberg has</a:t>
+              <a:t>Mortgage-backed securities</a:t>
+            </a:r>
+            <a:r>
+              <a:rPr sz="1900" b="0">
+                <a:solidFill>
+                  <a:srgbClr val="262626"/>
+                </a:solidFill>
+              </a:rPr>
+              <a:t> — engine built, awaiting data (882)</a:t>
             </a:r>
           </a:p>
           <a:p>
@@ -4942,7 +4733,7 @@
                   <a:srgbClr val="262626"/>
                 </a:solidFill>
               </a:rPr>
-              <a:t>The engine for them is already built and tested.</a:t>
+              <a:t>The other pooled products</a:t>
             </a:r>
             <a:r>
               <a:rPr sz="1900" b="0">
@@ -4950,7 +4741,7 @@
                   <a:srgbClr val="262626"/>
                 </a:solidFill>
               </a:rPr>
-              <a:t> It has been waiting on data, not on code — the day the data lands it runs with no further development</a:t>
+              <a:t> — collateralised mortgage obligations, asset-backed, commercial mortgage-backed. Scoped; each reuses machinery that already exists (412)</a:t>
             </a:r>
           </a:p>
           <a:p>
@@ -4973,7 +4764,7 @@
                   <a:srgbClr val="262626"/>
                 </a:solidFill>
               </a:rPr>
-              <a:t>Requested 22 July 2026.</a:t>
+              <a:t>A portfolio-level credit risk layer</a:t>
             </a:r>
             <a:r>
               <a:rPr sz="1900" b="0">
@@ -4981,7 +4772,7 @@
                   <a:srgbClr val="262626"/>
                 </a:solidFill>
               </a:rPr>
-              <a:t> [STATUS — confirm the week of presenting; see the note]</a:t>
+              <a:t> — in the original brief, not yet started</a:t>
             </a:r>
           </a:p>
           <a:p>
@@ -4996,7 +4787,7 @@
                   <a:srgbClr val="262626"/>
                 </a:solidFill>
               </a:rPr>
-              <a:t>•  A second, smaller request covers 164 ordinary bonds whose terms are missing from the file we were given</a:t>
+              <a:t>•  We are not blocked on anything in the second and third items except sequencing</a:t>
             </a:r>
           </a:p>
         </p:txBody>
@@ -5010,7 +4801,7 @@
 </file>
 
 <file path=ppt/slides/slide7.xml><?xml version="1.0" encoding="utf-8"?>
-<p:sld xmlns:a="http://schemas.openxmlformats.org/drawingml/2006/main" xmlns:p="http://schemas.openxmlformats.org/presentationml/2006/main" xmlns:r="http://schemas.openxmlformats.org/officeDocument/2006/relationships">
+<p:sld xmlns:a="http://schemas.openxmlformats.org/drawingml/2006/main" xmlns:r="http://schemas.openxmlformats.org/officeDocument/2006/relationships" xmlns:p="http://schemas.openxmlformats.org/presentationml/2006/main">
   <p:cSld>
     <p:spTree>
       <p:nvGrpSpPr>
@@ -5018,194 +4809,14 @@
         <p:cNvGrpSpPr/>
         <p:nvPr/>
       </p:nvGrpSpPr>
-      <p:grpSpPr/>
-      <p:sp>
-        <p:nvSpPr>
-          <p:cNvPr id="2" name="TextBox 1"/>
-          <p:cNvSpPr txBox="1"/>
-          <p:nvPr/>
-        </p:nvSpPr>
-        <p:spPr>
-          <a:xfrm>
-            <a:off x="731520" y="502920"/>
-            <a:ext cx="10728655" cy="1005840"/>
-          </a:xfrm>
-          <a:prstGeom prst="rect">
-            <a:avLst/>
-          </a:prstGeom>
-          <a:noFill/>
-        </p:spPr>
-        <p:txBody>
-          <a:bodyPr wrap="square">
-            <a:spAutoFit/>
-          </a:bodyPr>
-          <a:lstStyle/>
-          <a:p>
-            <a:pPr>
-              <a:spcAft>
-                <a:spcPts val="400"/>
-              </a:spcAft>
-            </a:pPr>
-            <a:r>
-              <a:rPr sz="3000" b="1">
-                <a:solidFill>
-                  <a:srgbClr val="1F4E79"/>
-                </a:solidFill>
-              </a:rPr>
-              <a:t>What is left</a:t>
-            </a:r>
-          </a:p>
-        </p:txBody>
-      </p:sp>
-      <p:sp>
-        <p:nvSpPr>
-          <p:cNvPr id="3" name="TextBox 2"/>
-          <p:cNvSpPr txBox="1"/>
-          <p:nvPr/>
-        </p:nvSpPr>
-        <p:spPr>
-          <a:xfrm>
-            <a:off x="731520" y="1600200"/>
-            <a:ext cx="10728655" cy="4709160"/>
-          </a:xfrm>
-          <a:prstGeom prst="rect">
-            <a:avLst/>
-          </a:prstGeom>
-          <a:noFill/>
-        </p:spPr>
-        <p:txBody>
-          <a:bodyPr wrap="square">
-            <a:spAutoFit/>
-          </a:bodyPr>
-          <a:lstStyle/>
-          <a:p>
-            <a:pPr>
-              <a:spcAft>
-                <a:spcPts val="1400"/>
-              </a:spcAft>
-            </a:pPr>
-            <a:r>
-              <a:rPr sz="1900" b="0">
-                <a:solidFill>
-                  <a:srgbClr val="262626"/>
-                </a:solidFill>
-              </a:rPr>
-              <a:t>•  </a:t>
-            </a:r>
-            <a:r>
-              <a:rPr sz="1900" b="1">
-                <a:solidFill>
-                  <a:srgbClr val="262626"/>
-                </a:solidFill>
-              </a:rPr>
-              <a:t>Mortgage-backed securities</a:t>
-            </a:r>
-            <a:r>
-              <a:rPr sz="1900" b="0">
-                <a:solidFill>
-                  <a:srgbClr val="262626"/>
-                </a:solidFill>
-              </a:rPr>
-              <a:t> — engine built, awaiting data (882)</a:t>
-            </a:r>
-          </a:p>
-          <a:p>
-            <a:pPr>
-              <a:spcAft>
-                <a:spcPts val="1400"/>
-              </a:spcAft>
-            </a:pPr>
-            <a:r>
-              <a:rPr sz="1900" b="0">
-                <a:solidFill>
-                  <a:srgbClr val="262626"/>
-                </a:solidFill>
-              </a:rPr>
-              <a:t>•  </a:t>
-            </a:r>
-            <a:r>
-              <a:rPr sz="1900" b="1">
-                <a:solidFill>
-                  <a:srgbClr val="262626"/>
-                </a:solidFill>
-              </a:rPr>
-              <a:t>The other pooled products</a:t>
-            </a:r>
-            <a:r>
-              <a:rPr sz="1900" b="0">
-                <a:solidFill>
-                  <a:srgbClr val="262626"/>
-                </a:solidFill>
-              </a:rPr>
-              <a:t> — collateralised mortgage obligations, asset-backed, commercial mortgage-backed. Scoped; each reuses machinery that already exists (412)</a:t>
-            </a:r>
-          </a:p>
-          <a:p>
-            <a:pPr>
-              <a:spcAft>
-                <a:spcPts val="1400"/>
-              </a:spcAft>
-            </a:pPr>
-            <a:r>
-              <a:rPr sz="1900" b="0">
-                <a:solidFill>
-                  <a:srgbClr val="262626"/>
-                </a:solidFill>
-              </a:rPr>
-              <a:t>•  </a:t>
-            </a:r>
-            <a:r>
-              <a:rPr sz="1900" b="1">
-                <a:solidFill>
-                  <a:srgbClr val="262626"/>
-                </a:solidFill>
-              </a:rPr>
-              <a:t>A portfolio-level credit risk layer</a:t>
-            </a:r>
-            <a:r>
-              <a:rPr sz="1900" b="0">
-                <a:solidFill>
-                  <a:srgbClr val="262626"/>
-                </a:solidFill>
-              </a:rPr>
-              <a:t> — in the original brief, not yet started</a:t>
-            </a:r>
-          </a:p>
-          <a:p>
-            <a:pPr>
-              <a:spcAft>
-                <a:spcPts val="1400"/>
-              </a:spcAft>
-            </a:pPr>
-            <a:r>
-              <a:rPr sz="1900" b="0">
-                <a:solidFill>
-                  <a:srgbClr val="262626"/>
-                </a:solidFill>
-              </a:rPr>
-              <a:t>•  We are not blocked on anything in the second and third items except sequencing</a:t>
-            </a:r>
-          </a:p>
-        </p:txBody>
-      </p:sp>
-    </p:spTree>
-  </p:cSld>
-  <p:clrMapOvr>
-    <a:masterClrMapping/>
-  </p:clrMapOvr>
-</p:sld>
-</file>
-
-<file path=ppt/slides/slide8.xml><?xml version="1.0" encoding="utf-8"?>
-<p:sld xmlns:a="http://schemas.openxmlformats.org/drawingml/2006/main" xmlns:p="http://schemas.openxmlformats.org/presentationml/2006/main" xmlns:r="http://schemas.openxmlformats.org/officeDocument/2006/relationships">
-  <p:cSld>
-    <p:spTree>
-      <p:nvGrpSpPr>
-        <p:cNvPr id="1" name=""/>
-        <p:cNvGrpSpPr/>
-        <p:nvPr/>
-      </p:nvGrpSpPr>
-      <p:grpSpPr/>
+      <p:grpSpPr>
+        <a:xfrm>
+          <a:off x="0" y="0"/>
+          <a:ext cx="0" cy="0"/>
+          <a:chOff x="0" y="0"/>
+          <a:chExt cx="0" cy="0"/>
+        </a:xfrm>
+      </p:grpSpPr>
       <p:sp>
         <p:nvSpPr>
           <p:cNvPr id="2" name="TextBox 1"/>
@@ -5683,44 +5294,44 @@
         <a:sysClr val="window" lastClr="FFFFFF"/>
       </a:lt1>
       <a:dk2>
-        <a:srgbClr val="1F497D"/>
+        <a:srgbClr val="44546A"/>
       </a:dk2>
       <a:lt2>
-        <a:srgbClr val="EEECE1"/>
+        <a:srgbClr val="E7E6E6"/>
       </a:lt2>
       <a:accent1>
-        <a:srgbClr val="4F81BD"/>
+        <a:srgbClr val="4472C4"/>
       </a:accent1>
       <a:accent2>
-        <a:srgbClr val="C0504D"/>
+        <a:srgbClr val="ED7D31"/>
       </a:accent2>
       <a:accent3>
-        <a:srgbClr val="9BBB59"/>
+        <a:srgbClr val="A5A5A5"/>
       </a:accent3>
       <a:accent4>
-        <a:srgbClr val="8064A2"/>
+        <a:srgbClr val="FFC000"/>
       </a:accent4>
       <a:accent5>
-        <a:srgbClr val="4BACC6"/>
+        <a:srgbClr val="5B9BD5"/>
       </a:accent5>
       <a:accent6>
-        <a:srgbClr val="F79646"/>
+        <a:srgbClr val="70AD47"/>
       </a:accent6>
       <a:hlink>
-        <a:srgbClr val="0000FF"/>
+        <a:srgbClr val="0563C1"/>
       </a:hlink>
       <a:folHlink>
-        <a:srgbClr val="800080"/>
+        <a:srgbClr val="954F72"/>
       </a:folHlink>
     </a:clrScheme>
     <a:fontScheme name="Office">
       <a:majorFont>
-        <a:latin typeface="Calibri"/>
+        <a:latin typeface="Calibri Light" panose="020F0302020204030204"/>
         <a:ea typeface=""/>
         <a:cs typeface=""/>
-        <a:font script="Jpan" typeface="ＭＳ Ｐゴシック"/>
+        <a:font script="Jpan" typeface="游ゴシック Light"/>
         <a:font script="Hang" typeface="맑은 고딕"/>
-        <a:font script="Hans" typeface="宋体"/>
+        <a:font script="Hans" typeface="等线 Light"/>
         <a:font script="Hant" typeface="新細明體"/>
         <a:font script="Arab" typeface="Times New Roman"/>
         <a:font script="Hebr" typeface="Times New Roman"/>
@@ -5748,14 +5359,31 @@
         <a:font script="Viet" typeface="Times New Roman"/>
         <a:font script="Uigh" typeface="Microsoft Uighur"/>
         <a:font script="Geor" typeface="Sylfaen"/>
+        <a:font script="Armn" typeface="Arial"/>
+        <a:font script="Bugi" typeface="Leelawadee UI"/>
+        <a:font script="Bopo" typeface="Microsoft JhengHei"/>
+        <a:font script="Java" typeface="Javanese Text"/>
+        <a:font script="Lisu" typeface="Segoe UI"/>
+        <a:font script="Mymr" typeface="Myanmar Text"/>
+        <a:font script="Nkoo" typeface="Ebrima"/>
+        <a:font script="Olck" typeface="Nirmala UI"/>
+        <a:font script="Osma" typeface="Ebrima"/>
+        <a:font script="Phag" typeface="Phagspa"/>
+        <a:font script="Syrn" typeface="Estrangelo Edessa"/>
+        <a:font script="Syrj" typeface="Estrangelo Edessa"/>
+        <a:font script="Syre" typeface="Estrangelo Edessa"/>
+        <a:font script="Sora" typeface="Nirmala UI"/>
+        <a:font script="Tale" typeface="Microsoft Tai Le"/>
+        <a:font script="Talu" typeface="Microsoft New Tai Lue"/>
+        <a:font script="Tfng" typeface="Ebrima"/>
       </a:majorFont>
       <a:minorFont>
-        <a:latin typeface="Calibri"/>
+        <a:latin typeface="Calibri" panose="020F0502020204030204"/>
         <a:ea typeface=""/>
         <a:cs typeface=""/>
-        <a:font script="Jpan" typeface="ＭＳ Ｐゴシック"/>
+        <a:font script="Jpan" typeface="游ゴシック"/>
         <a:font script="Hang" typeface="맑은 고딕"/>
-        <a:font script="Hans" typeface="宋体"/>
+        <a:font script="Hans" typeface="等线"/>
         <a:font script="Hant" typeface="新細明體"/>
         <a:font script="Arab" typeface="Arial"/>
         <a:font script="Hebr" typeface="Arial"/>
@@ -5783,6 +5411,23 @@
         <a:font script="Viet" typeface="Arial"/>
         <a:font script="Uigh" typeface="Microsoft Uighur"/>
         <a:font script="Geor" typeface="Sylfaen"/>
+        <a:font script="Armn" typeface="Arial"/>
+        <a:font script="Bugi" typeface="Leelawadee UI"/>
+        <a:font script="Bopo" typeface="Microsoft JhengHei"/>
+        <a:font script="Java" typeface="Javanese Text"/>
+        <a:font script="Lisu" typeface="Segoe UI"/>
+        <a:font script="Mymr" typeface="Myanmar Text"/>
+        <a:font script="Nkoo" typeface="Ebrima"/>
+        <a:font script="Olck" typeface="Nirmala UI"/>
+        <a:font script="Osma" typeface="Ebrima"/>
+        <a:font script="Phag" typeface="Phagspa"/>
+        <a:font script="Syrn" typeface="Estrangelo Edessa"/>
+        <a:font script="Syrj" typeface="Estrangelo Edessa"/>
+        <a:font script="Syre" typeface="Estrangelo Edessa"/>
+        <a:font script="Sora" typeface="Nirmala UI"/>
+        <a:font script="Tale" typeface="Microsoft Tai Le"/>
+        <a:font script="Talu" typeface="Microsoft New Tai Lue"/>
+        <a:font script="Tfng" typeface="Ebrima"/>
       </a:minorFont>
     </a:fontScheme>
     <a:fmtScheme name="Office">
@@ -5794,200 +5439,141 @@
           <a:gsLst>
             <a:gs pos="0">
               <a:schemeClr val="phClr">
-                <a:tint val="50000"/>
-                <a:satMod val="300000"/>
+                <a:lumMod val="110000"/>
+                <a:satMod val="105000"/>
+                <a:tint val="67000"/>
               </a:schemeClr>
             </a:gs>
-            <a:gs pos="35000">
+            <a:gs pos="50000">
               <a:schemeClr val="phClr">
-                <a:tint val="37000"/>
-                <a:satMod val="300000"/>
+                <a:lumMod val="105000"/>
+                <a:satMod val="103000"/>
+                <a:tint val="73000"/>
               </a:schemeClr>
             </a:gs>
             <a:gs pos="100000">
               <a:schemeClr val="phClr">
-                <a:tint val="15000"/>
-                <a:satMod val="350000"/>
+                <a:lumMod val="105000"/>
+                <a:satMod val="109000"/>
+                <a:tint val="81000"/>
               </a:schemeClr>
             </a:gs>
           </a:gsLst>
-          <a:lin ang="16200000" scaled="1"/>
+          <a:lin ang="5400000" scaled="0"/>
         </a:gradFill>
         <a:gradFill rotWithShape="1">
           <a:gsLst>
             <a:gs pos="0">
               <a:schemeClr val="phClr">
-                <a:tint val="100000"/>
+                <a:satMod val="103000"/>
+                <a:lumMod val="102000"/>
+                <a:tint val="94000"/>
+              </a:schemeClr>
+            </a:gs>
+            <a:gs pos="50000">
+              <a:schemeClr val="phClr">
+                <a:satMod val="110000"/>
+                <a:lumMod val="100000"/>
                 <a:shade val="100000"/>
-                <a:satMod val="130000"/>
               </a:schemeClr>
             </a:gs>
             <a:gs pos="100000">
               <a:schemeClr val="phClr">
-                <a:tint val="50000"/>
-                <a:shade val="100000"/>
-                <a:satMod val="350000"/>
+                <a:lumMod val="99000"/>
+                <a:satMod val="120000"/>
+                <a:shade val="78000"/>
               </a:schemeClr>
             </a:gs>
           </a:gsLst>
-          <a:lin ang="16200000" scaled="0"/>
+          <a:lin ang="5400000" scaled="0"/>
         </a:gradFill>
       </a:fillStyleLst>
       <a:lnStyleLst>
-        <a:ln w="9525" cap="flat" cmpd="sng" algn="ctr">
-          <a:solidFill>
-            <a:schemeClr val="phClr">
-              <a:shade val="95000"/>
-              <a:satMod val="105000"/>
-            </a:schemeClr>
-          </a:solidFill>
-          <a:prstDash val="solid"/>
-        </a:ln>
-        <a:ln w="25400" cap="flat" cmpd="sng" algn="ctr">
+        <a:ln w="6350" cap="flat" cmpd="sng" algn="ctr">
           <a:solidFill>
             <a:schemeClr val="phClr"/>
           </a:solidFill>
           <a:prstDash val="solid"/>
+          <a:miter lim="800000"/>
         </a:ln>
-        <a:ln w="38100" cap="flat" cmpd="sng" algn="ctr">
+        <a:ln w="12700" cap="flat" cmpd="sng" algn="ctr">
           <a:solidFill>
             <a:schemeClr val="phClr"/>
           </a:solidFill>
           <a:prstDash val="solid"/>
+          <a:miter lim="800000"/>
+        </a:ln>
+        <a:ln w="19050" cap="flat" cmpd="sng" algn="ctr">
+          <a:solidFill>
+            <a:schemeClr val="phClr"/>
+          </a:solidFill>
+          <a:prstDash val="solid"/>
+          <a:miter lim="800000"/>
         </a:ln>
       </a:lnStyleLst>
       <a:effectStyleLst>
         <a:effectStyle>
+          <a:effectLst/>
+        </a:effectStyle>
+        <a:effectStyle>
+          <a:effectLst/>
+        </a:effectStyle>
+        <a:effectStyle>
           <a:effectLst>
-            <a:outerShdw blurRad="40000" dist="20000" dir="5400000" rotWithShape="0">
+            <a:outerShdw blurRad="57150" dist="19050" dir="5400000" algn="ctr" rotWithShape="0">
               <a:srgbClr val="000000">
-                <a:alpha val="38000"/>
+                <a:alpha val="63000"/>
               </a:srgbClr>
             </a:outerShdw>
           </a:effectLst>
-        </a:effectStyle>
-        <a:effectStyle>
-          <a:effectLst>
-            <a:outerShdw blurRad="40000" dist="23000" dir="5400000" rotWithShape="0">
-              <a:srgbClr val="000000">
-                <a:alpha val="35000"/>
-              </a:srgbClr>
-            </a:outerShdw>
-          </a:effectLst>
-        </a:effectStyle>
-        <a:effectStyle>
-          <a:effectLst>
-            <a:outerShdw blurRad="40000" dist="23000" dir="5400000" rotWithShape="0">
-              <a:srgbClr val="000000">
-                <a:alpha val="35000"/>
-              </a:srgbClr>
-            </a:outerShdw>
-          </a:effectLst>
-          <a:scene3d>
-            <a:camera prst="orthographicFront">
-              <a:rot lat="0" lon="0" rev="0"/>
-            </a:camera>
-            <a:lightRig rig="threePt" dir="t">
-              <a:rot lat="0" lon="0" rev="1200000"/>
-            </a:lightRig>
-          </a:scene3d>
-          <a:sp3d>
-            <a:bevelT w="63500" h="25400"/>
-          </a:sp3d>
         </a:effectStyle>
       </a:effectStyleLst>
       <a:bgFillStyleLst>
         <a:solidFill>
           <a:schemeClr val="phClr"/>
         </a:solidFill>
+        <a:solidFill>
+          <a:schemeClr val="phClr">
+            <a:tint val="95000"/>
+            <a:satMod val="170000"/>
+          </a:schemeClr>
+        </a:solidFill>
         <a:gradFill rotWithShape="1">
           <a:gsLst>
             <a:gs pos="0">
               <a:schemeClr val="phClr">
-                <a:tint val="40000"/>
-                <a:satMod val="350000"/>
+                <a:tint val="93000"/>
+                <a:satMod val="150000"/>
+                <a:shade val="98000"/>
+                <a:lumMod val="102000"/>
               </a:schemeClr>
             </a:gs>
-            <a:gs pos="40000">
+            <a:gs pos="50000">
               <a:schemeClr val="phClr">
-                <a:tint val="45000"/>
-                <a:shade val="99000"/>
-                <a:satMod val="350000"/>
+                <a:tint val="98000"/>
+                <a:satMod val="130000"/>
+                <a:shade val="90000"/>
+                <a:lumMod val="103000"/>
               </a:schemeClr>
             </a:gs>
             <a:gs pos="100000">
               <a:schemeClr val="phClr">
-                <a:shade val="20000"/>
-                <a:satMod val="255000"/>
+                <a:shade val="63000"/>
+                <a:satMod val="120000"/>
               </a:schemeClr>
             </a:gs>
           </a:gsLst>
-          <a:path path="circle">
-            <a:fillToRect l="50000" t="-80000" r="50000" b="180000"/>
-          </a:path>
-        </a:gradFill>
-        <a:gradFill rotWithShape="1">
-          <a:gsLst>
-            <a:gs pos="0">
-              <a:schemeClr val="phClr">
-                <a:tint val="80000"/>
-                <a:satMod val="300000"/>
-              </a:schemeClr>
-            </a:gs>
-            <a:gs pos="100000">
-              <a:schemeClr val="phClr">
-                <a:shade val="30000"/>
-                <a:satMod val="200000"/>
-              </a:schemeClr>
-            </a:gs>
-          </a:gsLst>
-          <a:path path="circle">
-            <a:fillToRect l="50000" t="50000" r="50000" b="50000"/>
-          </a:path>
+          <a:lin ang="5400000" scaled="0"/>
         </a:gradFill>
       </a:bgFillStyleLst>
     </a:fmtScheme>
   </a:themeElements>
-  <a:objectDefaults>
-    <a:spDef>
-      <a:spPr/>
-      <a:bodyPr/>
-      <a:lstStyle/>
-      <a:style>
-        <a:lnRef idx="1">
-          <a:schemeClr val="accent1"/>
-        </a:lnRef>
-        <a:fillRef idx="3">
-          <a:schemeClr val="accent1"/>
-        </a:fillRef>
-        <a:effectRef idx="2">
-          <a:schemeClr val="accent1"/>
-        </a:effectRef>
-        <a:fontRef idx="minor">
-          <a:schemeClr val="lt1"/>
-        </a:fontRef>
-      </a:style>
-    </a:spDef>
-    <a:lnDef>
-      <a:spPr/>
-      <a:bodyPr/>
-      <a:lstStyle/>
-      <a:style>
-        <a:lnRef idx="2">
-          <a:schemeClr val="accent1"/>
-        </a:lnRef>
-        <a:fillRef idx="0">
-          <a:schemeClr val="accent1"/>
-        </a:fillRef>
-        <a:effectRef idx="1">
-          <a:schemeClr val="accent1"/>
-        </a:effectRef>
-        <a:fontRef idx="minor">
-          <a:schemeClr val="tx1"/>
-        </a:fontRef>
-      </a:style>
-    </a:lnDef>
-  </a:objectDefaults>
+  <a:objectDefaults/>
   <a:extraClrSchemeLst/>
+  <a:extLst>
+    <a:ext uri="{05A4C25C-085E-4340-85A3-A5531E510DB2}">
+      <thm15:themeFamily xmlns:thm15="http://schemas.microsoft.com/office/thememl/2012/main" name="Office Theme" id="{62F939B6-93AF-4DB8-9C6B-D6C7DFDC589F}" vid="{4A3C46E8-61CC-4603-A589-7422A47A8E4A}"/>
+    </a:ext>
+  </a:extLst>
 </a:theme>
 </file>